--- a/STP/presentations/Introduction and agenda.pptx
+++ b/STP/presentations/Introduction and agenda.pptx
@@ -7947,4 +7947,285 @@
     </a:ext>
   </a:extLst>
 </a:theme>
+</file>
+
+<file path=customXml/item1.xml><?xml version="1.0" encoding="utf-8"?>
+<ct:contentTypeSchema xmlns:ct="http://schemas.microsoft.com/office/2006/metadata/contentType" xmlns:ma="http://schemas.microsoft.com/office/2006/metadata/properties/metaAttributes" ct:_="" ma:_="" ma:contentTypeName="Document" ma:contentTypeID="0x01010072500CC7CC11694381E56D15BD009ABF" ma:contentTypeVersion="17" ma:contentTypeDescription="Create a new document." ma:contentTypeScope="" ma:versionID="5bde0183fae20f930619151b743545d5">
+  <xsd:schema xmlns:xsd="http://www.w3.org/2001/XMLSchema" xmlns:xs="http://www.w3.org/2001/XMLSchema" xmlns:p="http://schemas.microsoft.com/office/2006/metadata/properties" xmlns:ns2="c0caafef-fd22-48d0-85dc-526f5aa604f6" xmlns:ns3="cc7ce8ca-8f52-44ec-9496-3c41d0f5ad18" targetNamespace="http://schemas.microsoft.com/office/2006/metadata/properties" ma:root="true" ma:fieldsID="b93acc077f3eeba91a697f445d89f976" ns2:_="" ns3:_="">
+    <xsd:import namespace="c0caafef-fd22-48d0-85dc-526f5aa604f6"/>
+    <xsd:import namespace="cc7ce8ca-8f52-44ec-9496-3c41d0f5ad18"/>
+    <xsd:element name="properties">
+      <xsd:complexType>
+        <xsd:sequence>
+          <xsd:element name="documentManagement">
+            <xsd:complexType>
+              <xsd:all>
+                <xsd:element ref="ns2:MediaServiceMetadata" minOccurs="0"/>
+                <xsd:element ref="ns2:MediaServiceFastMetadata" minOccurs="0"/>
+                <xsd:element ref="ns2:MediaServiceAutoKeyPoints" minOccurs="0"/>
+                <xsd:element ref="ns2:MediaServiceKeyPoints" minOccurs="0"/>
+                <xsd:element ref="ns2:MediaServiceAutoTags" minOccurs="0"/>
+                <xsd:element ref="ns2:MediaServiceGenerationTime" minOccurs="0"/>
+                <xsd:element ref="ns2:MediaServiceEventHashCode" minOccurs="0"/>
+                <xsd:element ref="ns2:MediaServiceOCR" minOccurs="0"/>
+                <xsd:element ref="ns3:SharedWithUsers" minOccurs="0"/>
+                <xsd:element ref="ns3:SharedWithDetails" minOccurs="0"/>
+                <xsd:element ref="ns2:lcf76f155ced4ddcb4097134ff3c332f" minOccurs="0"/>
+                <xsd:element ref="ns3:TaxCatchAll" minOccurs="0"/>
+                <xsd:element ref="ns2:MediaServiceObjectDetectorVersions" minOccurs="0"/>
+                <xsd:element ref="ns2:MediaServiceDateTaken" minOccurs="0"/>
+                <xsd:element ref="ns2:MediaLengthInSeconds" minOccurs="0"/>
+                <xsd:element ref="ns2:MediaServiceSearchProperties" minOccurs="0"/>
+              </xsd:all>
+            </xsd:complexType>
+          </xsd:element>
+        </xsd:sequence>
+      </xsd:complexType>
+    </xsd:element>
+  </xsd:schema>
+  <xsd:schema xmlns:xsd="http://www.w3.org/2001/XMLSchema" xmlns:xs="http://www.w3.org/2001/XMLSchema" xmlns:dms="http://schemas.microsoft.com/office/2006/documentManagement/types" xmlns:pc="http://schemas.microsoft.com/office/infopath/2007/PartnerControls" targetNamespace="c0caafef-fd22-48d0-85dc-526f5aa604f6" elementFormDefault="qualified">
+    <xsd:import namespace="http://schemas.microsoft.com/office/2006/documentManagement/types"/>
+    <xsd:import namespace="http://schemas.microsoft.com/office/infopath/2007/PartnerControls"/>
+    <xsd:element name="MediaServiceMetadata" ma:index="8" nillable="true" ma:displayName="MediaServiceMetadata" ma:hidden="true" ma:internalName="MediaServiceMetadata" ma:readOnly="true">
+      <xsd:simpleType>
+        <xsd:restriction base="dms:Note"/>
+      </xsd:simpleType>
+    </xsd:element>
+    <xsd:element name="MediaServiceFastMetadata" ma:index="9" nillable="true" ma:displayName="MediaServiceFastMetadata" ma:hidden="true" ma:internalName="MediaServiceFastMetadata" ma:readOnly="true">
+      <xsd:simpleType>
+        <xsd:restriction base="dms:Note"/>
+      </xsd:simpleType>
+    </xsd:element>
+    <xsd:element name="MediaServiceAutoKeyPoints" ma:index="10" nillable="true" ma:displayName="MediaServiceAutoKeyPoints" ma:hidden="true" ma:internalName="MediaServiceAutoKeyPoints" ma:readOnly="true">
+      <xsd:simpleType>
+        <xsd:restriction base="dms:Note"/>
+      </xsd:simpleType>
+    </xsd:element>
+    <xsd:element name="MediaServiceKeyPoints" ma:index="11" nillable="true" ma:displayName="KeyPoints" ma:internalName="MediaServiceKeyPoints" ma:readOnly="true">
+      <xsd:simpleType>
+        <xsd:restriction base="dms:Note">
+          <xsd:maxLength value="255"/>
+        </xsd:restriction>
+      </xsd:simpleType>
+    </xsd:element>
+    <xsd:element name="MediaServiceAutoTags" ma:index="12" nillable="true" ma:displayName="Tags" ma:internalName="MediaServiceAutoTags" ma:readOnly="true">
+      <xsd:simpleType>
+        <xsd:restriction base="dms:Text"/>
+      </xsd:simpleType>
+    </xsd:element>
+    <xsd:element name="MediaServiceGenerationTime" ma:index="13" nillable="true" ma:displayName="MediaServiceGenerationTime" ma:hidden="true" ma:internalName="MediaServiceGenerationTime" ma:readOnly="true">
+      <xsd:simpleType>
+        <xsd:restriction base="dms:Text"/>
+      </xsd:simpleType>
+    </xsd:element>
+    <xsd:element name="MediaServiceEventHashCode" ma:index="14" nillable="true" ma:displayName="MediaServiceEventHashCode" ma:hidden="true" ma:internalName="MediaServiceEventHashCode" ma:readOnly="true">
+      <xsd:simpleType>
+        <xsd:restriction base="dms:Text"/>
+      </xsd:simpleType>
+    </xsd:element>
+    <xsd:element name="MediaServiceOCR" ma:index="15" nillable="true" ma:displayName="Extracted Text" ma:internalName="MediaServiceOCR" ma:readOnly="true">
+      <xsd:simpleType>
+        <xsd:restriction base="dms:Note">
+          <xsd:maxLength value="255"/>
+        </xsd:restriction>
+      </xsd:simpleType>
+    </xsd:element>
+    <xsd:element name="lcf76f155ced4ddcb4097134ff3c332f" ma:index="19" nillable="true" ma:taxonomy="true" ma:internalName="lcf76f155ced4ddcb4097134ff3c332f" ma:taxonomyFieldName="MediaServiceImageTags" ma:displayName="Image Tags" ma:readOnly="false" ma:fieldId="{5cf76f15-5ced-4ddc-b409-7134ff3c332f}" ma:taxonomyMulti="true" ma:sspId="f40eee1e-ad38-437e-be40-fc9f033adc9a" ma:termSetId="09814cd3-568e-fe90-9814-8d621ff8fb84" ma:anchorId="fba54fb3-c3e1-fe81-a776-ca4b69148c4d" ma:open="true" ma:isKeyword="false">
+      <xsd:complexType>
+        <xsd:sequence>
+          <xsd:element ref="pc:Terms" minOccurs="0" maxOccurs="1"/>
+        </xsd:sequence>
+      </xsd:complexType>
+    </xsd:element>
+    <xsd:element name="MediaServiceObjectDetectorVersions" ma:index="21" nillable="true" ma:displayName="MediaServiceObjectDetectorVersions" ma:hidden="true" ma:indexed="true" ma:internalName="MediaServiceObjectDetectorVersions" ma:readOnly="true">
+      <xsd:simpleType>
+        <xsd:restriction base="dms:Text"/>
+      </xsd:simpleType>
+    </xsd:element>
+    <xsd:element name="MediaServiceDateTaken" ma:index="22" nillable="true" ma:displayName="MediaServiceDateTaken" ma:hidden="true" ma:indexed="true" ma:internalName="MediaServiceDateTaken" ma:readOnly="true">
+      <xsd:simpleType>
+        <xsd:restriction base="dms:Text"/>
+      </xsd:simpleType>
+    </xsd:element>
+    <xsd:element name="MediaLengthInSeconds" ma:index="23" nillable="true" ma:displayName="MediaLengthInSeconds" ma:hidden="true" ma:internalName="MediaLengthInSeconds" ma:readOnly="true">
+      <xsd:simpleType>
+        <xsd:restriction base="dms:Unknown"/>
+      </xsd:simpleType>
+    </xsd:element>
+    <xsd:element name="MediaServiceSearchProperties" ma:index="24" nillable="true" ma:displayName="MediaServiceSearchProperties" ma:hidden="true" ma:internalName="MediaServiceSearchProperties" ma:readOnly="true">
+      <xsd:simpleType>
+        <xsd:restriction base="dms:Note"/>
+      </xsd:simpleType>
+    </xsd:element>
+  </xsd:schema>
+  <xsd:schema xmlns:xsd="http://www.w3.org/2001/XMLSchema" xmlns:xs="http://www.w3.org/2001/XMLSchema" xmlns:dms="http://schemas.microsoft.com/office/2006/documentManagement/types" xmlns:pc="http://schemas.microsoft.com/office/infopath/2007/PartnerControls" targetNamespace="cc7ce8ca-8f52-44ec-9496-3c41d0f5ad18" elementFormDefault="qualified">
+    <xsd:import namespace="http://schemas.microsoft.com/office/2006/documentManagement/types"/>
+    <xsd:import namespace="http://schemas.microsoft.com/office/infopath/2007/PartnerControls"/>
+    <xsd:element name="SharedWithUsers" ma:index="16" nillable="true" ma:displayName="Shared With" ma:internalName="SharedWithUsers" ma:readOnly="true">
+      <xsd:complexType>
+        <xsd:complexContent>
+          <xsd:extension base="dms:UserMulti">
+            <xsd:sequence>
+              <xsd:element name="UserInfo" minOccurs="0" maxOccurs="unbounded">
+                <xsd:complexType>
+                  <xsd:sequence>
+                    <xsd:element name="DisplayName" type="xsd:string" minOccurs="0"/>
+                    <xsd:element name="AccountId" type="dms:UserId" minOccurs="0" nillable="true"/>
+                    <xsd:element name="AccountType" type="xsd:string" minOccurs="0"/>
+                  </xsd:sequence>
+                </xsd:complexType>
+              </xsd:element>
+            </xsd:sequence>
+          </xsd:extension>
+        </xsd:complexContent>
+      </xsd:complexType>
+    </xsd:element>
+    <xsd:element name="SharedWithDetails" ma:index="17" nillable="true" ma:displayName="Shared With Details" ma:internalName="SharedWithDetails" ma:readOnly="true">
+      <xsd:simpleType>
+        <xsd:restriction base="dms:Note">
+          <xsd:maxLength value="255"/>
+        </xsd:restriction>
+      </xsd:simpleType>
+    </xsd:element>
+    <xsd:element name="TaxCatchAll" ma:index="20" nillable="true" ma:displayName="Taxonomy Catch All Column" ma:hidden="true" ma:list="{5dfeec75-c9d3-4c39-ba02-38eb92d5f92d}" ma:internalName="TaxCatchAll" ma:showField="CatchAllData" ma:web="cc7ce8ca-8f52-44ec-9496-3c41d0f5ad18">
+      <xsd:complexType>
+        <xsd:complexContent>
+          <xsd:extension base="dms:MultiChoiceLookup">
+            <xsd:sequence>
+              <xsd:element name="Value" type="dms:Lookup" maxOccurs="unbounded" minOccurs="0" nillable="true"/>
+            </xsd:sequence>
+          </xsd:extension>
+        </xsd:complexContent>
+      </xsd:complexType>
+    </xsd:element>
+  </xsd:schema>
+  <xsd:schema xmlns="http://schemas.openxmlformats.org/package/2006/metadata/core-properties" xmlns:xsd="http://www.w3.org/2001/XMLSchema" xmlns:xsi="http://www.w3.org/2001/XMLSchema-instance" xmlns:dc="http://purl.org/dc/elements/1.1/" xmlns:dcterms="http://purl.org/dc/terms/" xmlns:odoc="http://schemas.microsoft.com/internal/obd" targetNamespace="http://schemas.openxmlformats.org/package/2006/metadata/core-properties" elementFormDefault="qualified" attributeFormDefault="unqualified" blockDefault="#all">
+    <xsd:import namespace="http://purl.org/dc/elements/1.1/" schemaLocation="http://dublincore.org/schemas/xmls/qdc/2003/04/02/dc.xsd"/>
+    <xsd:import namespace="http://purl.org/dc/terms/" schemaLocation="http://dublincore.org/schemas/xmls/qdc/2003/04/02/dcterms.xsd"/>
+    <xsd:element name="coreProperties" type="CT_coreProperties"/>
+    <xsd:complexType name="CT_coreProperties">
+      <xsd:all>
+        <xsd:element ref="dc:creator" minOccurs="0" maxOccurs="1"/>
+        <xsd:element ref="dcterms:created" minOccurs="0" maxOccurs="1"/>
+        <xsd:element ref="dc:identifier" minOccurs="0" maxOccurs="1"/>
+        <xsd:element name="contentType" minOccurs="0" maxOccurs="1" type="xsd:string" ma:index="0" ma:displayName="Content Type"/>
+        <xsd:element ref="dc:title" minOccurs="0" maxOccurs="1" ma:index="4" ma:displayName="Title"/>
+        <xsd:element ref="dc:subject" minOccurs="0" maxOccurs="1"/>
+        <xsd:element ref="dc:description" minOccurs="0" maxOccurs="1"/>
+        <xsd:element name="keywords" minOccurs="0" maxOccurs="1" type="xsd:string"/>
+        <xsd:element ref="dc:language" minOccurs="0" maxOccurs="1"/>
+        <xsd:element name="category" minOccurs="0" maxOccurs="1" type="xsd:string"/>
+        <xsd:element name="version" minOccurs="0" maxOccurs="1" type="xsd:string"/>
+        <xsd:element name="revision" minOccurs="0" maxOccurs="1" type="xsd:string">
+          <xsd:annotation>
+            <xsd:documentation>
+                        This value indicates the number of saves or revisions. The application is responsible for updating this value after each revision.
+                    </xsd:documentation>
+          </xsd:annotation>
+        </xsd:element>
+        <xsd:element name="lastModifiedBy" minOccurs="0" maxOccurs="1" type="xsd:string"/>
+        <xsd:element ref="dcterms:modified" minOccurs="0" maxOccurs="1"/>
+        <xsd:element name="contentStatus" minOccurs="0" maxOccurs="1" type="xsd:string"/>
+      </xsd:all>
+    </xsd:complexType>
+  </xsd:schema>
+  <xs:schema xmlns:pc="http://schemas.microsoft.com/office/infopath/2007/PartnerControls" xmlns:xs="http://www.w3.org/2001/XMLSchema" targetNamespace="http://schemas.microsoft.com/office/infopath/2007/PartnerControls" elementFormDefault="qualified" attributeFormDefault="unqualified">
+    <xs:element name="Person">
+      <xs:complexType>
+        <xs:sequence>
+          <xs:element ref="pc:DisplayName" minOccurs="0"/>
+          <xs:element ref="pc:AccountId" minOccurs="0"/>
+          <xs:element ref="pc:AccountType" minOccurs="0"/>
+        </xs:sequence>
+      </xs:complexType>
+    </xs:element>
+    <xs:element name="DisplayName" type="xs:string"/>
+    <xs:element name="AccountId" type="xs:string"/>
+    <xs:element name="AccountType" type="xs:string"/>
+    <xs:element name="BDCAssociatedEntity">
+      <xs:complexType>
+        <xs:sequence>
+          <xs:element ref="pc:BDCEntity" minOccurs="0" maxOccurs="unbounded"/>
+        </xs:sequence>
+        <xs:attribute ref="pc:EntityNamespace"/>
+        <xs:attribute ref="pc:EntityName"/>
+        <xs:attribute ref="pc:SystemInstanceName"/>
+        <xs:attribute ref="pc:AssociationName"/>
+      </xs:complexType>
+    </xs:element>
+    <xs:attribute name="EntityNamespace" type="xs:string"/>
+    <xs:attribute name="EntityName" type="xs:string"/>
+    <xs:attribute name="SystemInstanceName" type="xs:string"/>
+    <xs:attribute name="AssociationName" type="xs:string"/>
+    <xs:element name="BDCEntity">
+      <xs:complexType>
+        <xs:sequence>
+          <xs:element ref="pc:EntityDisplayName" minOccurs="0"/>
+          <xs:element ref="pc:EntityInstanceReference" minOccurs="0"/>
+          <xs:element ref="pc:EntityId1" minOccurs="0"/>
+          <xs:element ref="pc:EntityId2" minOccurs="0"/>
+          <xs:element ref="pc:EntityId3" minOccurs="0"/>
+          <xs:element ref="pc:EntityId4" minOccurs="0"/>
+          <xs:element ref="pc:EntityId5" minOccurs="0"/>
+        </xs:sequence>
+      </xs:complexType>
+    </xs:element>
+    <xs:element name="EntityDisplayName" type="xs:string"/>
+    <xs:element name="EntityInstanceReference" type="xs:string"/>
+    <xs:element name="EntityId1" type="xs:string"/>
+    <xs:element name="EntityId2" type="xs:string"/>
+    <xs:element name="EntityId3" type="xs:string"/>
+    <xs:element name="EntityId4" type="xs:string"/>
+    <xs:element name="EntityId5" type="xs:string"/>
+    <xs:element name="Terms">
+      <xs:complexType>
+        <xs:sequence>
+          <xs:element ref="pc:TermInfo" minOccurs="0" maxOccurs="unbounded"/>
+        </xs:sequence>
+      </xs:complexType>
+    </xs:element>
+    <xs:element name="TermInfo">
+      <xs:complexType>
+        <xs:sequence>
+          <xs:element ref="pc:TermName" minOccurs="0"/>
+          <xs:element ref="pc:TermId" minOccurs="0"/>
+        </xs:sequence>
+      </xs:complexType>
+    </xs:element>
+    <xs:element name="TermName" type="xs:string"/>
+    <xs:element name="TermId" type="xs:string"/>
+  </xs:schema>
+</ct:contentTypeSchema>
+</file>
+
+<file path=customXml/item2.xml><?xml version="1.0" encoding="utf-8"?>
+<?mso-contentType ?>
+<FormTemplates xmlns="http://schemas.microsoft.com/sharepoint/v3/contenttype/forms">
+  <Display>DocumentLibraryForm</Display>
+  <Edit>DocumentLibraryForm</Edit>
+  <New>DocumentLibraryForm</New>
+</FormTemplates>
+</file>
+
+<file path=customXml/item3.xml><?xml version="1.0" encoding="utf-8"?>
+<p:properties xmlns:p="http://schemas.microsoft.com/office/2006/metadata/properties" xmlns:xsi="http://www.w3.org/2001/XMLSchema-instance" xmlns:pc="http://schemas.microsoft.com/office/infopath/2007/PartnerControls">
+  <documentManagement>
+    <lcf76f155ced4ddcb4097134ff3c332f xmlns="c0caafef-fd22-48d0-85dc-526f5aa604f6">
+      <Terms xmlns="http://schemas.microsoft.com/office/infopath/2007/PartnerControls"/>
+    </lcf76f155ced4ddcb4097134ff3c332f>
+    <TaxCatchAll xmlns="cc7ce8ca-8f52-44ec-9496-3c41d0f5ad18" xsi:nil="true"/>
+  </documentManagement>
+</p:properties>
+</file>
+
+<file path=customXml/itemProps1.xml><?xml version="1.0" encoding="utf-8"?>
+<ds:datastoreItem xmlns:ds="http://schemas.openxmlformats.org/officeDocument/2006/customXml" ds:itemID="{F8E82391-0565-41E9-9127-B1DFEFCF6557}"/>
+</file>
+
+<file path=customXml/itemProps2.xml><?xml version="1.0" encoding="utf-8"?>
+<ds:datastoreItem xmlns:ds="http://schemas.openxmlformats.org/officeDocument/2006/customXml" ds:itemID="{3A3DF9AB-00FC-46DB-A5D6-293E8DE99346}"/>
+</file>
+
+<file path=customXml/itemProps3.xml><?xml version="1.0" encoding="utf-8"?>
+<ds:datastoreItem xmlns:ds="http://schemas.openxmlformats.org/officeDocument/2006/customXml" ds:itemID="{E17CF73B-06D3-4F9B-955D-0740B08863BD}"/>
 </file>
--- a/STP/presentations/Introduction and agenda.pptx
+++ b/STP/presentations/Introduction and agenda.pptx
@@ -2,16 +2,13 @@
 <file path=ppt/presentation.xml><?xml version="1.0" encoding="utf-8"?>
 <p:presentation xmlns:a="http://schemas.openxmlformats.org/drawingml/2006/main" xmlns:r="http://schemas.openxmlformats.org/officeDocument/2006/relationships" xmlns:p="http://schemas.openxmlformats.org/presentationml/2006/main" saveSubsetFonts="1">
   <p:sldMasterIdLst>
-    <p:sldMasterId id="2147483648" r:id="rId1"/>
+    <p:sldMasterId id="2147483648" r:id="rId4"/>
   </p:sldMasterIdLst>
   <p:sldIdLst>
-    <p:sldId id="278" r:id="rId2"/>
-    <p:sldId id="261" r:id="rId3"/>
-    <p:sldId id="287" r:id="rId4"/>
-    <p:sldId id="279" r:id="rId5"/>
-    <p:sldId id="280" r:id="rId6"/>
-    <p:sldId id="281" r:id="rId7"/>
-    <p:sldId id="282" r:id="rId8"/>
+    <p:sldId id="278" r:id="rId5"/>
+    <p:sldId id="261" r:id="rId6"/>
+    <p:sldId id="287" r:id="rId7"/>
+    <p:sldId id="279" r:id="rId8"/>
   </p:sldIdLst>
   <p:sldSz cx="12192000" cy="6858000"/>
   <p:notesSz cx="6858000" cy="9144000"/>
@@ -734,7 +731,7 @@
           <a:p>
             <a:fld id="{F8A8B291-23C9-4CE5-96D0-E0118EB6230C}" type="datetimeFigureOut">
               <a:rPr lang="en-GB" smtClean="0"/>
-              <a:t>26/11/2025</a:t>
+              <a:t>27/11/2025</a:t>
             </a:fld>
             <a:endParaRPr lang="en-GB"/>
           </a:p>
@@ -934,7 +931,7 @@
           <a:p>
             <a:fld id="{F8A8B291-23C9-4CE5-96D0-E0118EB6230C}" type="datetimeFigureOut">
               <a:rPr lang="en-GB" smtClean="0"/>
-              <a:t>26/11/2025</a:t>
+              <a:t>27/11/2025</a:t>
             </a:fld>
             <a:endParaRPr lang="en-GB"/>
           </a:p>
@@ -1144,7 +1141,7 @@
           <a:p>
             <a:fld id="{F8A8B291-23C9-4CE5-96D0-E0118EB6230C}" type="datetimeFigureOut">
               <a:rPr lang="en-GB" smtClean="0"/>
-              <a:t>26/11/2025</a:t>
+              <a:t>27/11/2025</a:t>
             </a:fld>
             <a:endParaRPr lang="en-GB"/>
           </a:p>
@@ -1344,7 +1341,7 @@
           <a:p>
             <a:fld id="{F8A8B291-23C9-4CE5-96D0-E0118EB6230C}" type="datetimeFigureOut">
               <a:rPr lang="en-GB" smtClean="0"/>
-              <a:t>26/11/2025</a:t>
+              <a:t>27/11/2025</a:t>
             </a:fld>
             <a:endParaRPr lang="en-GB"/>
           </a:p>
@@ -1620,7 +1617,7 @@
           <a:p>
             <a:fld id="{F8A8B291-23C9-4CE5-96D0-E0118EB6230C}" type="datetimeFigureOut">
               <a:rPr lang="en-GB" smtClean="0"/>
-              <a:t>26/11/2025</a:t>
+              <a:t>27/11/2025</a:t>
             </a:fld>
             <a:endParaRPr lang="en-GB"/>
           </a:p>
@@ -1888,7 +1885,7 @@
           <a:p>
             <a:fld id="{F8A8B291-23C9-4CE5-96D0-E0118EB6230C}" type="datetimeFigureOut">
               <a:rPr lang="en-GB" smtClean="0"/>
-              <a:t>26/11/2025</a:t>
+              <a:t>27/11/2025</a:t>
             </a:fld>
             <a:endParaRPr lang="en-GB"/>
           </a:p>
@@ -2303,7 +2300,7 @@
           <a:p>
             <a:fld id="{F8A8B291-23C9-4CE5-96D0-E0118EB6230C}" type="datetimeFigureOut">
               <a:rPr lang="en-GB" smtClean="0"/>
-              <a:t>26/11/2025</a:t>
+              <a:t>27/11/2025</a:t>
             </a:fld>
             <a:endParaRPr lang="en-GB"/>
           </a:p>
@@ -2445,7 +2442,7 @@
           <a:p>
             <a:fld id="{F8A8B291-23C9-4CE5-96D0-E0118EB6230C}" type="datetimeFigureOut">
               <a:rPr lang="en-GB" smtClean="0"/>
-              <a:t>26/11/2025</a:t>
+              <a:t>27/11/2025</a:t>
             </a:fld>
             <a:endParaRPr lang="en-GB"/>
           </a:p>
@@ -2558,7 +2555,7 @@
           <a:p>
             <a:fld id="{F8A8B291-23C9-4CE5-96D0-E0118EB6230C}" type="datetimeFigureOut">
               <a:rPr lang="en-GB" smtClean="0"/>
-              <a:t>26/11/2025</a:t>
+              <a:t>27/11/2025</a:t>
             </a:fld>
             <a:endParaRPr lang="en-GB"/>
           </a:p>
@@ -2871,7 +2868,7 @@
           <a:p>
             <a:fld id="{F8A8B291-23C9-4CE5-96D0-E0118EB6230C}" type="datetimeFigureOut">
               <a:rPr lang="en-GB" smtClean="0"/>
-              <a:t>26/11/2025</a:t>
+              <a:t>27/11/2025</a:t>
             </a:fld>
             <a:endParaRPr lang="en-GB"/>
           </a:p>
@@ -3160,7 +3157,7 @@
           <a:p>
             <a:fld id="{F8A8B291-23C9-4CE5-96D0-E0118EB6230C}" type="datetimeFigureOut">
               <a:rPr lang="en-GB" smtClean="0"/>
-              <a:t>26/11/2025</a:t>
+              <a:t>27/11/2025</a:t>
             </a:fld>
             <a:endParaRPr lang="en-GB"/>
           </a:p>
@@ -3403,7 +3400,7 @@
           <a:p>
             <a:fld id="{F8A8B291-23C9-4CE5-96D0-E0118EB6230C}" type="datetimeFigureOut">
               <a:rPr lang="en-GB" smtClean="0"/>
-              <a:t>26/11/2025</a:t>
+              <a:t>27/11/2025</a:t>
             </a:fld>
             <a:endParaRPr lang="en-GB"/>
           </a:p>
@@ -4624,8 +4621,8 @@
         </p:nvSpPr>
         <p:spPr>
           <a:xfrm>
-            <a:off x="558800" y="1625600"/>
-            <a:ext cx="10795000" cy="3063083"/>
+            <a:off x="558800" y="1778226"/>
+            <a:ext cx="10795000" cy="2670668"/>
           </a:xfrm>
           <a:prstGeom prst="rect">
             <a:avLst/>
@@ -4923,36 +4920,6 @@
               <a:t>projeto</a:t>
             </a:r>
             <a:endParaRPr lang="en-GB" sz="1700" dirty="0"/>
-          </a:p>
-          <a:p>
-            <a:pPr marL="742950" lvl="1" indent="-285750" algn="just">
-              <a:lnSpc>
-                <a:spcPct val="150000"/>
-              </a:lnSpc>
-              <a:buFont typeface="Wingdings" pitchFamily="2" charset="2"/>
-              <a:buChar char="Ø"/>
-            </a:pPr>
-            <a:r>
-              <a:rPr lang="en-GB" sz="1700" dirty="0" err="1"/>
-              <a:t>Identificação</a:t>
-            </a:r>
-            <a:r>
-              <a:rPr lang="en-GB" sz="1700" dirty="0"/>
-              <a:t> de </a:t>
-            </a:r>
-            <a:r>
-              <a:rPr lang="en-GB" sz="1700" dirty="0" err="1"/>
-              <a:t>necessidades</a:t>
-            </a:r>
-            <a:r>
-              <a:rPr lang="en-GB" sz="1700" dirty="0"/>
-              <a:t> de </a:t>
-            </a:r>
-            <a:r>
-              <a:rPr lang="en-GB" sz="1700" dirty="0" err="1"/>
-              <a:t>capacitação</a:t>
-            </a:r>
-            <a:endParaRPr lang="en-IT" sz="1700" dirty="0"/>
           </a:p>
         </p:txBody>
       </p:sp>
@@ -6896,735 +6863,6 @@
     <p:extLst>
       <p:ext uri="{BB962C8B-B14F-4D97-AF65-F5344CB8AC3E}">
         <p14:creationId xmlns:p14="http://schemas.microsoft.com/office/powerpoint/2010/main" val="420207152"/>
-      </p:ext>
-    </p:extLst>
-  </p:cSld>
-  <p:clrMapOvr>
-    <a:masterClrMapping/>
-  </p:clrMapOvr>
-</p:sld>
-</file>
-
-<file path=ppt/slides/slide5.xml><?xml version="1.0" encoding="utf-8"?>
-<p:sld xmlns:a="http://schemas.openxmlformats.org/drawingml/2006/main" xmlns:r="http://schemas.openxmlformats.org/officeDocument/2006/relationships" xmlns:p="http://schemas.openxmlformats.org/presentationml/2006/main">
-  <p:cSld>
-    <p:spTree>
-      <p:nvGrpSpPr>
-        <p:cNvPr id="1" name="">
-          <a:extLst>
-            <a:ext uri="{FF2B5EF4-FFF2-40B4-BE49-F238E27FC236}">
-              <a16:creationId xmlns:a16="http://schemas.microsoft.com/office/drawing/2014/main" id="{EE847211-0B8C-F41F-2047-58290553B506}"/>
-            </a:ext>
-          </a:extLst>
-        </p:cNvPr>
-        <p:cNvGrpSpPr/>
-        <p:nvPr/>
-      </p:nvGrpSpPr>
-      <p:grpSpPr>
-        <a:xfrm>
-          <a:off x="0" y="0"/>
-          <a:ext cx="0" cy="0"/>
-          <a:chOff x="0" y="0"/>
-          <a:chExt cx="0" cy="0"/>
-        </a:xfrm>
-      </p:grpSpPr>
-      <p:sp>
-        <p:nvSpPr>
-          <p:cNvPr id="2" name="Title 1">
-            <a:extLst>
-              <a:ext uri="{FF2B5EF4-FFF2-40B4-BE49-F238E27FC236}">
-                <a16:creationId xmlns:a16="http://schemas.microsoft.com/office/drawing/2014/main" id="{02A92917-28B5-83B3-3269-9201C5B5E360}"/>
-              </a:ext>
-            </a:extLst>
-          </p:cNvPr>
-          <p:cNvSpPr>
-            <a:spLocks noGrp="1"/>
-          </p:cNvSpPr>
-          <p:nvPr>
-            <p:ph type="title"/>
-          </p:nvPr>
-        </p:nvSpPr>
-        <p:spPr>
-          <a:xfrm>
-            <a:off x="838200" y="365125"/>
-            <a:ext cx="10360052" cy="1325563"/>
-          </a:xfrm>
-        </p:spPr>
-        <p:txBody>
-          <a:bodyPr>
-            <a:normAutofit/>
-          </a:bodyPr>
-          <a:lstStyle/>
-          <a:p>
-            <a:r>
-              <a:rPr lang="en-US" sz="3200" b="1" dirty="0">
-                <a:solidFill>
-                  <a:srgbClr val="0070C0"/>
-                </a:solidFill>
-                <a:latin typeface="Arial" panose="020B0604020202020204" pitchFamily="34" charset="0"/>
-                <a:cs typeface="Arial" panose="020B0604020202020204" pitchFamily="34" charset="0"/>
-              </a:rPr>
-              <a:t>Agenda</a:t>
-            </a:r>
-          </a:p>
-        </p:txBody>
-      </p:sp>
-      <p:grpSp>
-        <p:nvGrpSpPr>
-          <p:cNvPr id="6" name="Group 5">
-            <a:extLst>
-              <a:ext uri="{FF2B5EF4-FFF2-40B4-BE49-F238E27FC236}">
-                <a16:creationId xmlns:a16="http://schemas.microsoft.com/office/drawing/2014/main" id="{7A70B76D-7462-14A3-73CE-6DEA345792F9}"/>
-              </a:ext>
-            </a:extLst>
-          </p:cNvPr>
-          <p:cNvGrpSpPr/>
-          <p:nvPr/>
-        </p:nvGrpSpPr>
-        <p:grpSpPr>
-          <a:xfrm>
-            <a:off x="-16329" y="-38779"/>
-            <a:ext cx="12393386" cy="316366"/>
-            <a:chOff x="-16329" y="5228994"/>
-            <a:chExt cx="12208329" cy="575436"/>
-          </a:xfrm>
-        </p:grpSpPr>
-        <p:sp>
-          <p:nvSpPr>
-            <p:cNvPr id="8" name="Rectangle 7">
-              <a:extLst>
-                <a:ext uri="{FF2B5EF4-FFF2-40B4-BE49-F238E27FC236}">
-                  <a16:creationId xmlns:a16="http://schemas.microsoft.com/office/drawing/2014/main" id="{B02FF9A0-E1D5-9B54-DEFE-A091A3303B4C}"/>
-                </a:ext>
-              </a:extLst>
-            </p:cNvPr>
-            <p:cNvSpPr/>
-            <p:nvPr/>
-          </p:nvSpPr>
-          <p:spPr>
-            <a:xfrm>
-              <a:off x="-16329" y="5228994"/>
-              <a:ext cx="10205358" cy="575436"/>
-            </a:xfrm>
-            <a:prstGeom prst="rect">
-              <a:avLst/>
-            </a:prstGeom>
-            <a:solidFill>
-              <a:schemeClr val="accent5">
-                <a:lumMod val="50000"/>
-              </a:schemeClr>
-            </a:solidFill>
-            <a:ln>
-              <a:noFill/>
-            </a:ln>
-          </p:spPr>
-          <p:style>
-            <a:lnRef idx="2">
-              <a:schemeClr val="accent1">
-                <a:shade val="50000"/>
-              </a:schemeClr>
-            </a:lnRef>
-            <a:fillRef idx="1">
-              <a:schemeClr val="accent1"/>
-            </a:fillRef>
-            <a:effectRef idx="0">
-              <a:schemeClr val="accent1"/>
-            </a:effectRef>
-            <a:fontRef idx="minor">
-              <a:schemeClr val="lt1"/>
-            </a:fontRef>
-          </p:style>
-          <p:txBody>
-            <a:bodyPr rtlCol="0" anchor="ctr"/>
-            <a:lstStyle/>
-            <a:p>
-              <a:pPr algn="ctr"/>
-              <a:endParaRPr lang="en-US"/>
-            </a:p>
-          </p:txBody>
-        </p:sp>
-        <p:sp>
-          <p:nvSpPr>
-            <p:cNvPr id="9" name="Rectangle 8">
-              <a:extLst>
-                <a:ext uri="{FF2B5EF4-FFF2-40B4-BE49-F238E27FC236}">
-                  <a16:creationId xmlns:a16="http://schemas.microsoft.com/office/drawing/2014/main" id="{902997F2-81D7-B228-2A07-DEC40C81F189}"/>
-                </a:ext>
-              </a:extLst>
-            </p:cNvPr>
-            <p:cNvSpPr/>
-            <p:nvPr/>
-          </p:nvSpPr>
-          <p:spPr>
-            <a:xfrm>
-              <a:off x="10189029" y="5228994"/>
-              <a:ext cx="2002971" cy="575435"/>
-            </a:xfrm>
-            <a:prstGeom prst="rect">
-              <a:avLst/>
-            </a:prstGeom>
-            <a:solidFill>
-              <a:schemeClr val="accent4"/>
-            </a:solidFill>
-            <a:ln>
-              <a:noFill/>
-            </a:ln>
-          </p:spPr>
-          <p:style>
-            <a:lnRef idx="2">
-              <a:schemeClr val="accent1">
-                <a:shade val="50000"/>
-              </a:schemeClr>
-            </a:lnRef>
-            <a:fillRef idx="1">
-              <a:schemeClr val="accent1"/>
-            </a:fillRef>
-            <a:effectRef idx="0">
-              <a:schemeClr val="accent1"/>
-            </a:effectRef>
-            <a:fontRef idx="minor">
-              <a:schemeClr val="lt1"/>
-            </a:fontRef>
-          </p:style>
-          <p:txBody>
-            <a:bodyPr rtlCol="0" anchor="ctr"/>
-            <a:lstStyle/>
-            <a:p>
-              <a:pPr algn="ctr"/>
-              <a:endParaRPr lang="en-US"/>
-            </a:p>
-          </p:txBody>
-        </p:sp>
-      </p:grpSp>
-      <p:cxnSp>
-        <p:nvCxnSpPr>
-          <p:cNvPr id="10" name="Connecteur droit 6">
-            <a:extLst>
-              <a:ext uri="{FF2B5EF4-FFF2-40B4-BE49-F238E27FC236}">
-                <a16:creationId xmlns:a16="http://schemas.microsoft.com/office/drawing/2014/main" id="{35800B6E-57D4-3E50-D861-F89ED32E764B}"/>
-              </a:ext>
-            </a:extLst>
-          </p:cNvPr>
-          <p:cNvCxnSpPr>
-            <a:cxnSpLocks/>
-          </p:cNvCxnSpPr>
-          <p:nvPr/>
-        </p:nvCxnSpPr>
-        <p:spPr>
-          <a:xfrm>
-            <a:off x="-16329" y="395044"/>
-            <a:ext cx="12208329" cy="0"/>
-          </a:xfrm>
-          <a:prstGeom prst="line">
-            <a:avLst/>
-          </a:prstGeom>
-          <a:ln w="28575"/>
-        </p:spPr>
-        <p:style>
-          <a:lnRef idx="1">
-            <a:schemeClr val="accent1"/>
-          </a:lnRef>
-          <a:fillRef idx="0">
-            <a:schemeClr val="accent1"/>
-          </a:fillRef>
-          <a:effectRef idx="0">
-            <a:schemeClr val="accent1"/>
-          </a:effectRef>
-          <a:fontRef idx="minor">
-            <a:schemeClr val="tx1"/>
-          </a:fontRef>
-        </p:style>
-      </p:cxnSp>
-    </p:spTree>
-    <p:extLst>
-      <p:ext uri="{BB962C8B-B14F-4D97-AF65-F5344CB8AC3E}">
-        <p14:creationId xmlns:p14="http://schemas.microsoft.com/office/powerpoint/2010/main" val="4083595417"/>
-      </p:ext>
-    </p:extLst>
-  </p:cSld>
-  <p:clrMapOvr>
-    <a:masterClrMapping/>
-  </p:clrMapOvr>
-</p:sld>
-</file>
-
-<file path=ppt/slides/slide6.xml><?xml version="1.0" encoding="utf-8"?>
-<p:sld xmlns:a="http://schemas.openxmlformats.org/drawingml/2006/main" xmlns:r="http://schemas.openxmlformats.org/officeDocument/2006/relationships" xmlns:p="http://schemas.openxmlformats.org/presentationml/2006/main">
-  <p:cSld>
-    <p:spTree>
-      <p:nvGrpSpPr>
-        <p:cNvPr id="1" name="">
-          <a:extLst>
-            <a:ext uri="{FF2B5EF4-FFF2-40B4-BE49-F238E27FC236}">
-              <a16:creationId xmlns:a16="http://schemas.microsoft.com/office/drawing/2014/main" id="{E54C9236-25AA-0E8D-F4CE-41244FB5F2E9}"/>
-            </a:ext>
-          </a:extLst>
-        </p:cNvPr>
-        <p:cNvGrpSpPr/>
-        <p:nvPr/>
-      </p:nvGrpSpPr>
-      <p:grpSpPr>
-        <a:xfrm>
-          <a:off x="0" y="0"/>
-          <a:ext cx="0" cy="0"/>
-          <a:chOff x="0" y="0"/>
-          <a:chExt cx="0" cy="0"/>
-        </a:xfrm>
-      </p:grpSpPr>
-      <p:sp>
-        <p:nvSpPr>
-          <p:cNvPr id="2" name="Title 1">
-            <a:extLst>
-              <a:ext uri="{FF2B5EF4-FFF2-40B4-BE49-F238E27FC236}">
-                <a16:creationId xmlns:a16="http://schemas.microsoft.com/office/drawing/2014/main" id="{89B9AEF8-019C-71BC-60DB-4AF450489E29}"/>
-              </a:ext>
-            </a:extLst>
-          </p:cNvPr>
-          <p:cNvSpPr>
-            <a:spLocks noGrp="1"/>
-          </p:cNvSpPr>
-          <p:nvPr>
-            <p:ph type="title"/>
-          </p:nvPr>
-        </p:nvSpPr>
-        <p:spPr>
-          <a:xfrm>
-            <a:off x="838200" y="365125"/>
-            <a:ext cx="10360052" cy="1325563"/>
-          </a:xfrm>
-        </p:spPr>
-        <p:txBody>
-          <a:bodyPr>
-            <a:normAutofit/>
-          </a:bodyPr>
-          <a:lstStyle/>
-          <a:p>
-            <a:r>
-              <a:rPr lang="en-US" sz="3200" b="1" dirty="0">
-                <a:solidFill>
-                  <a:srgbClr val="0070C0"/>
-                </a:solidFill>
-                <a:latin typeface="Arial" panose="020B0604020202020204" pitchFamily="34" charset="0"/>
-                <a:cs typeface="Arial" panose="020B0604020202020204" pitchFamily="34" charset="0"/>
-              </a:rPr>
-              <a:t>Agenda</a:t>
-            </a:r>
-          </a:p>
-        </p:txBody>
-      </p:sp>
-      <p:grpSp>
-        <p:nvGrpSpPr>
-          <p:cNvPr id="6" name="Group 5">
-            <a:extLst>
-              <a:ext uri="{FF2B5EF4-FFF2-40B4-BE49-F238E27FC236}">
-                <a16:creationId xmlns:a16="http://schemas.microsoft.com/office/drawing/2014/main" id="{37F87F9F-0E21-DA0A-5301-D1612C388048}"/>
-              </a:ext>
-            </a:extLst>
-          </p:cNvPr>
-          <p:cNvGrpSpPr/>
-          <p:nvPr/>
-        </p:nvGrpSpPr>
-        <p:grpSpPr>
-          <a:xfrm>
-            <a:off x="-16329" y="-38779"/>
-            <a:ext cx="12393386" cy="316366"/>
-            <a:chOff x="-16329" y="5228994"/>
-            <a:chExt cx="12208329" cy="575436"/>
-          </a:xfrm>
-        </p:grpSpPr>
-        <p:sp>
-          <p:nvSpPr>
-            <p:cNvPr id="8" name="Rectangle 7">
-              <a:extLst>
-                <a:ext uri="{FF2B5EF4-FFF2-40B4-BE49-F238E27FC236}">
-                  <a16:creationId xmlns:a16="http://schemas.microsoft.com/office/drawing/2014/main" id="{CA9B54BE-00D4-D3AE-AE7C-FEA52E2D98DF}"/>
-                </a:ext>
-              </a:extLst>
-            </p:cNvPr>
-            <p:cNvSpPr/>
-            <p:nvPr/>
-          </p:nvSpPr>
-          <p:spPr>
-            <a:xfrm>
-              <a:off x="-16329" y="5228994"/>
-              <a:ext cx="10205358" cy="575436"/>
-            </a:xfrm>
-            <a:prstGeom prst="rect">
-              <a:avLst/>
-            </a:prstGeom>
-            <a:solidFill>
-              <a:schemeClr val="accent5">
-                <a:lumMod val="50000"/>
-              </a:schemeClr>
-            </a:solidFill>
-            <a:ln>
-              <a:noFill/>
-            </a:ln>
-          </p:spPr>
-          <p:style>
-            <a:lnRef idx="2">
-              <a:schemeClr val="accent1">
-                <a:shade val="50000"/>
-              </a:schemeClr>
-            </a:lnRef>
-            <a:fillRef idx="1">
-              <a:schemeClr val="accent1"/>
-            </a:fillRef>
-            <a:effectRef idx="0">
-              <a:schemeClr val="accent1"/>
-            </a:effectRef>
-            <a:fontRef idx="minor">
-              <a:schemeClr val="lt1"/>
-            </a:fontRef>
-          </p:style>
-          <p:txBody>
-            <a:bodyPr rtlCol="0" anchor="ctr"/>
-            <a:lstStyle/>
-            <a:p>
-              <a:pPr algn="ctr"/>
-              <a:endParaRPr lang="en-US"/>
-            </a:p>
-          </p:txBody>
-        </p:sp>
-        <p:sp>
-          <p:nvSpPr>
-            <p:cNvPr id="9" name="Rectangle 8">
-              <a:extLst>
-                <a:ext uri="{FF2B5EF4-FFF2-40B4-BE49-F238E27FC236}">
-                  <a16:creationId xmlns:a16="http://schemas.microsoft.com/office/drawing/2014/main" id="{DFA94128-45F8-AEBD-4950-CA30A2E69C6C}"/>
-                </a:ext>
-              </a:extLst>
-            </p:cNvPr>
-            <p:cNvSpPr/>
-            <p:nvPr/>
-          </p:nvSpPr>
-          <p:spPr>
-            <a:xfrm>
-              <a:off x="10189029" y="5228994"/>
-              <a:ext cx="2002971" cy="575435"/>
-            </a:xfrm>
-            <a:prstGeom prst="rect">
-              <a:avLst/>
-            </a:prstGeom>
-            <a:solidFill>
-              <a:schemeClr val="accent4"/>
-            </a:solidFill>
-            <a:ln>
-              <a:noFill/>
-            </a:ln>
-          </p:spPr>
-          <p:style>
-            <a:lnRef idx="2">
-              <a:schemeClr val="accent1">
-                <a:shade val="50000"/>
-              </a:schemeClr>
-            </a:lnRef>
-            <a:fillRef idx="1">
-              <a:schemeClr val="accent1"/>
-            </a:fillRef>
-            <a:effectRef idx="0">
-              <a:schemeClr val="accent1"/>
-            </a:effectRef>
-            <a:fontRef idx="minor">
-              <a:schemeClr val="lt1"/>
-            </a:fontRef>
-          </p:style>
-          <p:txBody>
-            <a:bodyPr rtlCol="0" anchor="ctr"/>
-            <a:lstStyle/>
-            <a:p>
-              <a:pPr algn="ctr"/>
-              <a:endParaRPr lang="en-US"/>
-            </a:p>
-          </p:txBody>
-        </p:sp>
-      </p:grpSp>
-      <p:cxnSp>
-        <p:nvCxnSpPr>
-          <p:cNvPr id="10" name="Connecteur droit 6">
-            <a:extLst>
-              <a:ext uri="{FF2B5EF4-FFF2-40B4-BE49-F238E27FC236}">
-                <a16:creationId xmlns:a16="http://schemas.microsoft.com/office/drawing/2014/main" id="{FA58916B-6B34-2213-21DC-AA1B7CD9F14A}"/>
-              </a:ext>
-            </a:extLst>
-          </p:cNvPr>
-          <p:cNvCxnSpPr>
-            <a:cxnSpLocks/>
-          </p:cNvCxnSpPr>
-          <p:nvPr/>
-        </p:nvCxnSpPr>
-        <p:spPr>
-          <a:xfrm>
-            <a:off x="-16329" y="395044"/>
-            <a:ext cx="12208329" cy="0"/>
-          </a:xfrm>
-          <a:prstGeom prst="line">
-            <a:avLst/>
-          </a:prstGeom>
-          <a:ln w="28575"/>
-        </p:spPr>
-        <p:style>
-          <a:lnRef idx="1">
-            <a:schemeClr val="accent1"/>
-          </a:lnRef>
-          <a:fillRef idx="0">
-            <a:schemeClr val="accent1"/>
-          </a:fillRef>
-          <a:effectRef idx="0">
-            <a:schemeClr val="accent1"/>
-          </a:effectRef>
-          <a:fontRef idx="minor">
-            <a:schemeClr val="tx1"/>
-          </a:fontRef>
-        </p:style>
-      </p:cxnSp>
-    </p:spTree>
-    <p:extLst>
-      <p:ext uri="{BB962C8B-B14F-4D97-AF65-F5344CB8AC3E}">
-        <p14:creationId xmlns:p14="http://schemas.microsoft.com/office/powerpoint/2010/main" val="1365306902"/>
-      </p:ext>
-    </p:extLst>
-  </p:cSld>
-  <p:clrMapOvr>
-    <a:masterClrMapping/>
-  </p:clrMapOvr>
-</p:sld>
-</file>
-
-<file path=ppt/slides/slide7.xml><?xml version="1.0" encoding="utf-8"?>
-<p:sld xmlns:a="http://schemas.openxmlformats.org/drawingml/2006/main" xmlns:r="http://schemas.openxmlformats.org/officeDocument/2006/relationships" xmlns:p="http://schemas.openxmlformats.org/presentationml/2006/main">
-  <p:cSld>
-    <p:spTree>
-      <p:nvGrpSpPr>
-        <p:cNvPr id="1" name="">
-          <a:extLst>
-            <a:ext uri="{FF2B5EF4-FFF2-40B4-BE49-F238E27FC236}">
-              <a16:creationId xmlns:a16="http://schemas.microsoft.com/office/drawing/2014/main" id="{0166FE47-E342-EBAE-6478-B0C7FA43DB19}"/>
-            </a:ext>
-          </a:extLst>
-        </p:cNvPr>
-        <p:cNvGrpSpPr/>
-        <p:nvPr/>
-      </p:nvGrpSpPr>
-      <p:grpSpPr>
-        <a:xfrm>
-          <a:off x="0" y="0"/>
-          <a:ext cx="0" cy="0"/>
-          <a:chOff x="0" y="0"/>
-          <a:chExt cx="0" cy="0"/>
-        </a:xfrm>
-      </p:grpSpPr>
-      <p:sp>
-        <p:nvSpPr>
-          <p:cNvPr id="2" name="Title 1">
-            <a:extLst>
-              <a:ext uri="{FF2B5EF4-FFF2-40B4-BE49-F238E27FC236}">
-                <a16:creationId xmlns:a16="http://schemas.microsoft.com/office/drawing/2014/main" id="{4306D993-EA5F-E8C5-E35E-493F04911693}"/>
-              </a:ext>
-            </a:extLst>
-          </p:cNvPr>
-          <p:cNvSpPr>
-            <a:spLocks noGrp="1"/>
-          </p:cNvSpPr>
-          <p:nvPr>
-            <p:ph type="title"/>
-          </p:nvPr>
-        </p:nvSpPr>
-        <p:spPr>
-          <a:xfrm>
-            <a:off x="838200" y="365125"/>
-            <a:ext cx="10360052" cy="1325563"/>
-          </a:xfrm>
-        </p:spPr>
-        <p:txBody>
-          <a:bodyPr>
-            <a:normAutofit/>
-          </a:bodyPr>
-          <a:lstStyle/>
-          <a:p>
-            <a:r>
-              <a:rPr lang="en-US" sz="3200" b="1" dirty="0">
-                <a:solidFill>
-                  <a:srgbClr val="0070C0"/>
-                </a:solidFill>
-                <a:latin typeface="Arial" panose="020B0604020202020204" pitchFamily="34" charset="0"/>
-                <a:cs typeface="Arial" panose="020B0604020202020204" pitchFamily="34" charset="0"/>
-              </a:rPr>
-              <a:t>Agenda</a:t>
-            </a:r>
-          </a:p>
-        </p:txBody>
-      </p:sp>
-      <p:grpSp>
-        <p:nvGrpSpPr>
-          <p:cNvPr id="6" name="Group 5">
-            <a:extLst>
-              <a:ext uri="{FF2B5EF4-FFF2-40B4-BE49-F238E27FC236}">
-                <a16:creationId xmlns:a16="http://schemas.microsoft.com/office/drawing/2014/main" id="{0CE5CB58-A1D9-5322-865A-EDEED669A841}"/>
-              </a:ext>
-            </a:extLst>
-          </p:cNvPr>
-          <p:cNvGrpSpPr/>
-          <p:nvPr/>
-        </p:nvGrpSpPr>
-        <p:grpSpPr>
-          <a:xfrm>
-            <a:off x="-16329" y="-38779"/>
-            <a:ext cx="12393386" cy="316366"/>
-            <a:chOff x="-16329" y="5228994"/>
-            <a:chExt cx="12208329" cy="575436"/>
-          </a:xfrm>
-        </p:grpSpPr>
-        <p:sp>
-          <p:nvSpPr>
-            <p:cNvPr id="8" name="Rectangle 7">
-              <a:extLst>
-                <a:ext uri="{FF2B5EF4-FFF2-40B4-BE49-F238E27FC236}">
-                  <a16:creationId xmlns:a16="http://schemas.microsoft.com/office/drawing/2014/main" id="{6C87DBAA-A221-57F7-C24B-5F8D2BD4CFB4}"/>
-                </a:ext>
-              </a:extLst>
-            </p:cNvPr>
-            <p:cNvSpPr/>
-            <p:nvPr/>
-          </p:nvSpPr>
-          <p:spPr>
-            <a:xfrm>
-              <a:off x="-16329" y="5228994"/>
-              <a:ext cx="10205358" cy="575436"/>
-            </a:xfrm>
-            <a:prstGeom prst="rect">
-              <a:avLst/>
-            </a:prstGeom>
-            <a:solidFill>
-              <a:schemeClr val="accent5">
-                <a:lumMod val="50000"/>
-              </a:schemeClr>
-            </a:solidFill>
-            <a:ln>
-              <a:noFill/>
-            </a:ln>
-          </p:spPr>
-          <p:style>
-            <a:lnRef idx="2">
-              <a:schemeClr val="accent1">
-                <a:shade val="50000"/>
-              </a:schemeClr>
-            </a:lnRef>
-            <a:fillRef idx="1">
-              <a:schemeClr val="accent1"/>
-            </a:fillRef>
-            <a:effectRef idx="0">
-              <a:schemeClr val="accent1"/>
-            </a:effectRef>
-            <a:fontRef idx="minor">
-              <a:schemeClr val="lt1"/>
-            </a:fontRef>
-          </p:style>
-          <p:txBody>
-            <a:bodyPr rtlCol="0" anchor="ctr"/>
-            <a:lstStyle/>
-            <a:p>
-              <a:pPr algn="ctr"/>
-              <a:endParaRPr lang="en-US"/>
-            </a:p>
-          </p:txBody>
-        </p:sp>
-        <p:sp>
-          <p:nvSpPr>
-            <p:cNvPr id="9" name="Rectangle 8">
-              <a:extLst>
-                <a:ext uri="{FF2B5EF4-FFF2-40B4-BE49-F238E27FC236}">
-                  <a16:creationId xmlns:a16="http://schemas.microsoft.com/office/drawing/2014/main" id="{6B744847-A68C-EBD2-E114-7BCB32D83E81}"/>
-                </a:ext>
-              </a:extLst>
-            </p:cNvPr>
-            <p:cNvSpPr/>
-            <p:nvPr/>
-          </p:nvSpPr>
-          <p:spPr>
-            <a:xfrm>
-              <a:off x="10189029" y="5228994"/>
-              <a:ext cx="2002971" cy="575435"/>
-            </a:xfrm>
-            <a:prstGeom prst="rect">
-              <a:avLst/>
-            </a:prstGeom>
-            <a:solidFill>
-              <a:schemeClr val="accent4"/>
-            </a:solidFill>
-            <a:ln>
-              <a:noFill/>
-            </a:ln>
-          </p:spPr>
-          <p:style>
-            <a:lnRef idx="2">
-              <a:schemeClr val="accent1">
-                <a:shade val="50000"/>
-              </a:schemeClr>
-            </a:lnRef>
-            <a:fillRef idx="1">
-              <a:schemeClr val="accent1"/>
-            </a:fillRef>
-            <a:effectRef idx="0">
-              <a:schemeClr val="accent1"/>
-            </a:effectRef>
-            <a:fontRef idx="minor">
-              <a:schemeClr val="lt1"/>
-            </a:fontRef>
-          </p:style>
-          <p:txBody>
-            <a:bodyPr rtlCol="0" anchor="ctr"/>
-            <a:lstStyle/>
-            <a:p>
-              <a:pPr algn="ctr"/>
-              <a:endParaRPr lang="en-US"/>
-            </a:p>
-          </p:txBody>
-        </p:sp>
-      </p:grpSp>
-      <p:cxnSp>
-        <p:nvCxnSpPr>
-          <p:cNvPr id="10" name="Connecteur droit 6">
-            <a:extLst>
-              <a:ext uri="{FF2B5EF4-FFF2-40B4-BE49-F238E27FC236}">
-                <a16:creationId xmlns:a16="http://schemas.microsoft.com/office/drawing/2014/main" id="{39E4B516-981F-F51E-6DDF-C1170FE27303}"/>
-              </a:ext>
-            </a:extLst>
-          </p:cNvPr>
-          <p:cNvCxnSpPr>
-            <a:cxnSpLocks/>
-          </p:cNvCxnSpPr>
-          <p:nvPr/>
-        </p:nvCxnSpPr>
-        <p:spPr>
-          <a:xfrm>
-            <a:off x="-16329" y="395044"/>
-            <a:ext cx="12208329" cy="0"/>
-          </a:xfrm>
-          <a:prstGeom prst="line">
-            <a:avLst/>
-          </a:prstGeom>
-          <a:ln w="28575"/>
-        </p:spPr>
-        <p:style>
-          <a:lnRef idx="1">
-            <a:schemeClr val="accent1"/>
-          </a:lnRef>
-          <a:fillRef idx="0">
-            <a:schemeClr val="accent1"/>
-          </a:fillRef>
-          <a:effectRef idx="0">
-            <a:schemeClr val="accent1"/>
-          </a:effectRef>
-          <a:fontRef idx="minor">
-            <a:schemeClr val="tx1"/>
-          </a:fontRef>
-        </p:style>
-      </p:cxnSp>
-    </p:spTree>
-    <p:extLst>
-      <p:ext uri="{BB962C8B-B14F-4D97-AF65-F5344CB8AC3E}">
-        <p14:creationId xmlns:p14="http://schemas.microsoft.com/office/powerpoint/2010/main" val="839021354"/>
       </p:ext>
     </p:extLst>
   </p:cSld>
@@ -7950,6 +7188,26 @@
 </file>
 
 <file path=customXml/item1.xml><?xml version="1.0" encoding="utf-8"?>
+<p:properties xmlns:p="http://schemas.microsoft.com/office/2006/metadata/properties" xmlns:xsi="http://www.w3.org/2001/XMLSchema-instance" xmlns:pc="http://schemas.microsoft.com/office/infopath/2007/PartnerControls">
+  <documentManagement>
+    <lcf76f155ced4ddcb4097134ff3c332f xmlns="c0caafef-fd22-48d0-85dc-526f5aa604f6">
+      <Terms xmlns="http://schemas.microsoft.com/office/infopath/2007/PartnerControls"/>
+    </lcf76f155ced4ddcb4097134ff3c332f>
+    <TaxCatchAll xmlns="cc7ce8ca-8f52-44ec-9496-3c41d0f5ad18" xsi:nil="true"/>
+  </documentManagement>
+</p:properties>
+</file>
+
+<file path=customXml/item2.xml><?xml version="1.0" encoding="utf-8"?>
+<?mso-contentType ?>
+<FormTemplates xmlns="http://schemas.microsoft.com/sharepoint/v3/contenttype/forms">
+  <Display>DocumentLibraryForm</Display>
+  <Edit>DocumentLibraryForm</Edit>
+  <New>DocumentLibraryForm</New>
+</FormTemplates>
+</file>
+
+<file path=customXml/item3.xml><?xml version="1.0" encoding="utf-8"?>
 <ct:contentTypeSchema xmlns:ct="http://schemas.microsoft.com/office/2006/metadata/contentType" xmlns:ma="http://schemas.microsoft.com/office/2006/metadata/properties/metaAttributes" ct:_="" ma:_="" ma:contentTypeName="Document" ma:contentTypeID="0x01010072500CC7CC11694381E56D15BD009ABF" ma:contentTypeVersion="17" ma:contentTypeDescription="Create a new document." ma:contentTypeScope="" ma:versionID="5bde0183fae20f930619151b743545d5">
   <xsd:schema xmlns:xsd="http://www.w3.org/2001/XMLSchema" xmlns:xs="http://www.w3.org/2001/XMLSchema" xmlns:p="http://schemas.microsoft.com/office/2006/metadata/properties" xmlns:ns2="c0caafef-fd22-48d0-85dc-526f5aa604f6" xmlns:ns3="cc7ce8ca-8f52-44ec-9496-3c41d0f5ad18" targetNamespace="http://schemas.microsoft.com/office/2006/metadata/properties" ma:root="true" ma:fieldsID="b93acc077f3eeba91a697f445d89f976" ns2:_="" ns3:_="">
     <xsd:import namespace="c0caafef-fd22-48d0-85dc-526f5aa604f6"/>
@@ -8198,34 +7456,40 @@
 </ct:contentTypeSchema>
 </file>
 
-<file path=customXml/item2.xml><?xml version="1.0" encoding="utf-8"?>
-<?mso-contentType ?>
-<FormTemplates xmlns="http://schemas.microsoft.com/sharepoint/v3/contenttype/forms">
-  <Display>DocumentLibraryForm</Display>
-  <Edit>DocumentLibraryForm</Edit>
-  <New>DocumentLibraryForm</New>
-</FormTemplates>
-</file>
-
-<file path=customXml/item3.xml><?xml version="1.0" encoding="utf-8"?>
-<p:properties xmlns:p="http://schemas.microsoft.com/office/2006/metadata/properties" xmlns:xsi="http://www.w3.org/2001/XMLSchema-instance" xmlns:pc="http://schemas.microsoft.com/office/infopath/2007/PartnerControls">
-  <documentManagement>
-    <lcf76f155ced4ddcb4097134ff3c332f xmlns="c0caafef-fd22-48d0-85dc-526f5aa604f6">
-      <Terms xmlns="http://schemas.microsoft.com/office/infopath/2007/PartnerControls"/>
-    </lcf76f155ced4ddcb4097134ff3c332f>
-    <TaxCatchAll xmlns="cc7ce8ca-8f52-44ec-9496-3c41d0f5ad18" xsi:nil="true"/>
-  </documentManagement>
-</p:properties>
-</file>
-
 <file path=customXml/itemProps1.xml><?xml version="1.0" encoding="utf-8"?>
-<ds:datastoreItem xmlns:ds="http://schemas.openxmlformats.org/officeDocument/2006/customXml" ds:itemID="{F8E82391-0565-41E9-9127-B1DFEFCF6557}"/>
+<ds:datastoreItem xmlns:ds="http://schemas.openxmlformats.org/officeDocument/2006/customXml" ds:itemID="{E17CF73B-06D3-4F9B-955D-0740B08863BD}">
+  <ds:schemaRefs>
+    <ds:schemaRef ds:uri="http://schemas.microsoft.com/office/2006/metadata/properties"/>
+    <ds:schemaRef ds:uri="http://schemas.microsoft.com/office/infopath/2007/PartnerControls"/>
+    <ds:schemaRef ds:uri="c0caafef-fd22-48d0-85dc-526f5aa604f6"/>
+    <ds:schemaRef ds:uri="cc7ce8ca-8f52-44ec-9496-3c41d0f5ad18"/>
+  </ds:schemaRefs>
+</ds:datastoreItem>
 </file>
 
 <file path=customXml/itemProps2.xml><?xml version="1.0" encoding="utf-8"?>
-<ds:datastoreItem xmlns:ds="http://schemas.openxmlformats.org/officeDocument/2006/customXml" ds:itemID="{3A3DF9AB-00FC-46DB-A5D6-293E8DE99346}"/>
+<ds:datastoreItem xmlns:ds="http://schemas.openxmlformats.org/officeDocument/2006/customXml" ds:itemID="{3A3DF9AB-00FC-46DB-A5D6-293E8DE99346}">
+  <ds:schemaRefs>
+    <ds:schemaRef ds:uri="http://schemas.microsoft.com/sharepoint/v3/contenttype/forms"/>
+  </ds:schemaRefs>
+</ds:datastoreItem>
 </file>
 
 <file path=customXml/itemProps3.xml><?xml version="1.0" encoding="utf-8"?>
-<ds:datastoreItem xmlns:ds="http://schemas.openxmlformats.org/officeDocument/2006/customXml" ds:itemID="{E17CF73B-06D3-4F9B-955D-0740B08863BD}"/>
+<ds:datastoreItem xmlns:ds="http://schemas.openxmlformats.org/officeDocument/2006/customXml" ds:itemID="{F8E82391-0565-41E9-9127-B1DFEFCF6557}">
+  <ds:schemaRefs>
+    <ds:schemaRef ds:uri="http://schemas.microsoft.com/office/2006/metadata/contentType"/>
+    <ds:schemaRef ds:uri="http://schemas.microsoft.com/office/2006/metadata/properties/metaAttributes"/>
+    <ds:schemaRef ds:uri="http://www.w3.org/2001/XMLSchema"/>
+    <ds:schemaRef ds:uri="http://schemas.microsoft.com/office/2006/metadata/properties"/>
+    <ds:schemaRef ds:uri="c0caafef-fd22-48d0-85dc-526f5aa604f6"/>
+    <ds:schemaRef ds:uri="cc7ce8ca-8f52-44ec-9496-3c41d0f5ad18"/>
+    <ds:schemaRef ds:uri="http://schemas.microsoft.com/office/2006/documentManagement/types"/>
+    <ds:schemaRef ds:uri="http://schemas.microsoft.com/office/infopath/2007/PartnerControls"/>
+    <ds:schemaRef ds:uri="http://schemas.openxmlformats.org/package/2006/metadata/core-properties"/>
+    <ds:schemaRef ds:uri="http://purl.org/dc/elements/1.1/"/>
+    <ds:schemaRef ds:uri="http://purl.org/dc/terms/"/>
+    <ds:schemaRef ds:uri="http://schemas.microsoft.com/internal/obd"/>
+  </ds:schemaRefs>
+</ds:datastoreItem>
 </file>